--- a/entregas/posts/site/kit/editavel/efeito-rebote-qua-28-10.pptx
+++ b/entregas/posts/site/kit/editavel/efeito-rebote-qua-28-10.pptx
@@ -4145,7 +4145,7 @@
         </p:nvSpPr>
         <p:spPr>
           <a:xfrm>
-            <a:off x="915442" y="3906235"/>
+            <a:off x="915442" y="3845336"/>
             <a:ext cx="3183434" cy="304495"/>
           </a:xfrm>
           <a:prstGeom prst="rect">
@@ -4171,13 +4171,13 @@
               </a:spcAft>
             </a:pPr>
             <a:r>
-              <a:rPr b="0" i="0" sz="2397" lang="pt-BR">
+              <a:rPr b="1" i="0" sz="2397" lang="pt-BR">
                 <a:solidFill>
                   <a:srgbClr val="E9C46A"/>
                 </a:solidFill>
-                <a:latin typeface="Barlow SemiBold"/>
-                <a:ea typeface="Barlow SemiBold"/>
-                <a:cs typeface="Barlow SemiBold"/>
+                <a:latin typeface="Barlow"/>
+                <a:ea typeface="Barlow"/>
+                <a:cs typeface="Barlow"/>
               </a:rPr>
               <a:t>Ação de arrecadação</a:t>
             </a:r>
@@ -4192,7 +4192,7 @@
         </p:nvSpPr>
         <p:spPr>
           <a:xfrm>
-            <a:off x="915442" y="4661681"/>
+            <a:off x="915442" y="4385580"/>
             <a:ext cx="6996261" cy="3689747"/>
           </a:xfrm>
           <a:prstGeom prst="rect">
@@ -4263,7 +4263,7 @@
         </p:nvSpPr>
         <p:spPr>
           <a:xfrm>
-            <a:off x="915442" y="8535124"/>
+            <a:off x="915442" y="8575140"/>
             <a:ext cx="5240765" cy="1560641"/>
           </a:xfrm>
           <a:prstGeom prst="rect">
@@ -4310,7 +4310,7 @@
         </p:nvSpPr>
         <p:spPr>
           <a:xfrm>
-            <a:off x="915442" y="11515339"/>
+            <a:off x="915442" y="11496308"/>
             <a:ext cx="1210717" cy="437712"/>
           </a:xfrm>
           <a:prstGeom prst="rect">
@@ -4793,7 +4793,7 @@
         </p:nvSpPr>
         <p:spPr>
           <a:xfrm>
-            <a:off x="915442" y="1079840"/>
+            <a:off x="915442" y="1018941"/>
             <a:ext cx="2288917" cy="304495"/>
           </a:xfrm>
           <a:prstGeom prst="rect">
@@ -4819,13 +4819,13 @@
               </a:spcAft>
             </a:pPr>
             <a:r>
-              <a:rPr b="0" i="0" sz="2397" lang="pt-BR">
+              <a:rPr b="1" i="0" sz="2397" lang="pt-BR">
                 <a:solidFill>
                   <a:srgbClr val="B5121B"/>
                 </a:solidFill>
-                <a:latin typeface="Barlow SemiBold"/>
-                <a:ea typeface="Barlow SemiBold"/>
-                <a:cs typeface="Barlow SemiBold"/>
+                <a:latin typeface="Barlow"/>
+                <a:ea typeface="Barlow"/>
+                <a:cs typeface="Barlow"/>
               </a:rPr>
               <a:t>Como funciona</a:t>
             </a:r>
@@ -4840,7 +4840,7 @@
         </p:nvSpPr>
         <p:spPr>
           <a:xfrm>
-            <a:off x="915442" y="3615602"/>
+            <a:off x="915442" y="3406035"/>
             <a:ext cx="4629820" cy="933524"/>
           </a:xfrm>
           <a:prstGeom prst="rect">
@@ -4887,7 +4887,7 @@
         </p:nvSpPr>
         <p:spPr>
           <a:xfrm>
-            <a:off x="1488378" y="5173587"/>
+            <a:off x="1488378" y="5402987"/>
             <a:ext cx="195218" cy="686143"/>
           </a:xfrm>
           <a:prstGeom prst="rect">
@@ -4934,7 +4934,7 @@
         </p:nvSpPr>
         <p:spPr>
           <a:xfrm>
-            <a:off x="2175867" y="5088413"/>
+            <a:off x="2175867" y="5128430"/>
             <a:ext cx="6821394" cy="1040427"/>
           </a:xfrm>
           <a:prstGeom prst="rect">
@@ -4981,7 +4981,7 @@
         </p:nvSpPr>
         <p:spPr>
           <a:xfrm>
-            <a:off x="1456283" y="6815459"/>
+            <a:off x="1456283" y="7044859"/>
             <a:ext cx="259556" cy="686143"/>
           </a:xfrm>
           <a:prstGeom prst="rect">
@@ -5028,7 +5028,7 @@
         </p:nvSpPr>
         <p:spPr>
           <a:xfrm>
-            <a:off x="2175867" y="6990288"/>
+            <a:off x="2175867" y="7030304"/>
             <a:ext cx="6983328" cy="520214"/>
           </a:xfrm>
           <a:prstGeom prst="rect">
@@ -5075,7 +5075,7 @@
         </p:nvSpPr>
         <p:spPr>
           <a:xfrm>
-            <a:off x="1456618" y="8280225"/>
+            <a:off x="1456618" y="8509625"/>
             <a:ext cx="258738" cy="686143"/>
           </a:xfrm>
           <a:prstGeom prst="rect">
@@ -5122,7 +5122,7 @@
         </p:nvSpPr>
         <p:spPr>
           <a:xfrm>
-            <a:off x="2175867" y="8455054"/>
+            <a:off x="2175867" y="8495071"/>
             <a:ext cx="7263765" cy="520214"/>
           </a:xfrm>
           <a:prstGeom prst="rect">
@@ -5169,7 +5169,7 @@
         </p:nvSpPr>
         <p:spPr>
           <a:xfrm>
-            <a:off x="915442" y="11515488"/>
+            <a:off x="915442" y="11496457"/>
             <a:ext cx="2594238" cy="437712"/>
           </a:xfrm>
           <a:prstGeom prst="rect">
@@ -5475,7 +5475,7 @@
         </p:nvSpPr>
         <p:spPr>
           <a:xfrm>
-            <a:off x="915442" y="1079840"/>
+            <a:off x="915442" y="1018941"/>
             <a:ext cx="1391945" cy="304495"/>
           </a:xfrm>
           <a:prstGeom prst="rect">
@@ -5501,13 +5501,13 @@
               </a:spcAft>
             </a:pPr>
             <a:r>
-              <a:rPr b="0" i="0" sz="2397" lang="pt-BR">
+              <a:rPr b="1" i="0" sz="2397" lang="pt-BR">
                 <a:solidFill>
                   <a:srgbClr val="B5121B"/>
                 </a:solidFill>
-                <a:latin typeface="Barlow SemiBold"/>
-                <a:ea typeface="Barlow SemiBold"/>
-                <a:cs typeface="Barlow SemiBold"/>
+                <a:latin typeface="Barlow"/>
+                <a:ea typeface="Barlow"/>
+                <a:cs typeface="Barlow"/>
               </a:rPr>
               <a:t>O prêmio</a:t>
             </a:r>
@@ -5522,7 +5522,7 @@
         </p:nvSpPr>
         <p:spPr>
           <a:xfrm>
-            <a:off x="915442" y="4468834"/>
+            <a:off x="915442" y="4259266"/>
             <a:ext cx="3787363" cy="933524"/>
           </a:xfrm>
           <a:prstGeom prst="rect">
@@ -5569,7 +5569,7 @@
         </p:nvSpPr>
         <p:spPr>
           <a:xfrm>
-            <a:off x="1353145" y="6032266"/>
+            <a:off x="1353145" y="6104296"/>
             <a:ext cx="7889310" cy="1104454"/>
           </a:xfrm>
           <a:prstGeom prst="rect">
@@ -5627,7 +5627,7 @@
         </p:nvSpPr>
         <p:spPr>
           <a:xfrm>
-            <a:off x="915442" y="7916727"/>
+            <a:off x="915442" y="7988757"/>
             <a:ext cx="7583656" cy="552227"/>
           </a:xfrm>
           <a:prstGeom prst="rect">
@@ -5674,7 +5674,7 @@
         </p:nvSpPr>
         <p:spPr>
           <a:xfrm>
-            <a:off x="915442" y="11515339"/>
+            <a:off x="915442" y="11496308"/>
             <a:ext cx="4267855" cy="437712"/>
           </a:xfrm>
           <a:prstGeom prst="rect">
@@ -5947,7 +5947,7 @@
         </p:nvSpPr>
         <p:spPr>
           <a:xfrm>
-            <a:off x="915442" y="1079840"/>
+            <a:off x="915442" y="1018941"/>
             <a:ext cx="2182832" cy="304495"/>
           </a:xfrm>
           <a:prstGeom prst="rect">
@@ -5973,13 +5973,13 @@
               </a:spcAft>
             </a:pPr>
             <a:r>
-              <a:rPr b="0" i="0" sz="2397" lang="pt-BR">
+              <a:rPr b="1" i="0" sz="2397" lang="pt-BR">
                 <a:solidFill>
                   <a:srgbClr val="B5121B"/>
                 </a:solidFill>
-                <a:latin typeface="Barlow SemiBold"/>
-                <a:ea typeface="Barlow SemiBold"/>
-                <a:cs typeface="Barlow SemiBold"/>
+                <a:latin typeface="Barlow"/>
+                <a:ea typeface="Barlow"/>
+                <a:cs typeface="Barlow"/>
               </a:rPr>
               <a:t>Transparência</a:t>
             </a:r>
@@ -5994,7 +5994,7 @@
         </p:nvSpPr>
         <p:spPr>
           <a:xfrm>
-            <a:off x="915442" y="5058788"/>
+            <a:off x="915442" y="4849221"/>
             <a:ext cx="9078501" cy="933524"/>
           </a:xfrm>
           <a:prstGeom prst="rect">
@@ -6041,7 +6041,7 @@
         </p:nvSpPr>
         <p:spPr>
           <a:xfrm>
-            <a:off x="915442" y="6222617"/>
+            <a:off x="915442" y="6294647"/>
             <a:ext cx="8630251" cy="1656681"/>
           </a:xfrm>
           <a:prstGeom prst="rect">
@@ -6088,7 +6088,7 @@
         </p:nvSpPr>
         <p:spPr>
           <a:xfrm>
-            <a:off x="915442" y="11515488"/>
+            <a:off x="915442" y="11496457"/>
             <a:ext cx="1823159" cy="437712"/>
           </a:xfrm>
           <a:prstGeom prst="rect">
@@ -6518,7 +6518,7 @@
         </p:nvSpPr>
         <p:spPr>
           <a:xfrm>
-            <a:off x="915442" y="1079840"/>
+            <a:off x="915442" y="1018941"/>
             <a:ext cx="918984" cy="304495"/>
           </a:xfrm>
           <a:prstGeom prst="rect">
@@ -6544,13 +6544,13 @@
               </a:spcAft>
             </a:pPr>
             <a:r>
-              <a:rPr b="0" i="0" sz="2397" lang="pt-BR">
+              <a:rPr b="1" i="0" sz="2397" lang="pt-BR">
                 <a:solidFill>
                   <a:srgbClr val="B5121B"/>
                 </a:solidFill>
-                <a:latin typeface="Barlow SemiBold"/>
-                <a:ea typeface="Barlow SemiBold"/>
-                <a:cs typeface="Barlow SemiBold"/>
+                <a:latin typeface="Barlow"/>
+                <a:ea typeface="Barlow"/>
+                <a:cs typeface="Barlow"/>
               </a:rPr>
               <a:t>Datas</a:t>
             </a:r>
@@ -6565,7 +6565,7 @@
         </p:nvSpPr>
         <p:spPr>
           <a:xfrm>
-            <a:off x="915442" y="3261391"/>
+            <a:off x="915442" y="3051824"/>
             <a:ext cx="8611270" cy="933524"/>
           </a:xfrm>
           <a:prstGeom prst="rect">
@@ -6612,7 +6612,7 @@
         </p:nvSpPr>
         <p:spPr>
           <a:xfrm>
-            <a:off x="1488378" y="4819376"/>
+            <a:off x="1488378" y="5048776"/>
             <a:ext cx="195218" cy="686143"/>
           </a:xfrm>
           <a:prstGeom prst="rect">
@@ -6659,7 +6659,7 @@
         </p:nvSpPr>
         <p:spPr>
           <a:xfrm>
-            <a:off x="2175867" y="4734202"/>
+            <a:off x="2175867" y="4774219"/>
             <a:ext cx="6985998" cy="1040427"/>
           </a:xfrm>
           <a:prstGeom prst="rect">
@@ -6706,7 +6706,7 @@
         </p:nvSpPr>
         <p:spPr>
           <a:xfrm>
-            <a:off x="1456283" y="6638353"/>
+            <a:off x="1456283" y="6867754"/>
             <a:ext cx="259556" cy="686143"/>
           </a:xfrm>
           <a:prstGeom prst="rect">
@@ -6753,7 +6753,7 @@
         </p:nvSpPr>
         <p:spPr>
           <a:xfrm>
-            <a:off x="2175867" y="6553180"/>
+            <a:off x="2175867" y="6593196"/>
             <a:ext cx="6657088" cy="1040427"/>
           </a:xfrm>
           <a:prstGeom prst="rect">
@@ -6800,7 +6800,7 @@
         </p:nvSpPr>
         <p:spPr>
           <a:xfrm>
-            <a:off x="1243012" y="8372157"/>
+            <a:off x="1243012" y="8412173"/>
             <a:ext cx="7428836" cy="1040427"/>
           </a:xfrm>
           <a:prstGeom prst="rect">
@@ -6847,7 +6847,7 @@
         </p:nvSpPr>
         <p:spPr>
           <a:xfrm>
-            <a:off x="915442" y="11515488"/>
+            <a:off x="915442" y="11496457"/>
             <a:ext cx="1849517" cy="437712"/>
           </a:xfrm>
           <a:prstGeom prst="rect">
@@ -6975,7 +6975,7 @@
         </p:nvSpPr>
         <p:spPr>
           <a:xfrm>
-            <a:off x="3868735" y="5183925"/>
+            <a:off x="3868735" y="5123026"/>
             <a:ext cx="2549381" cy="304495"/>
           </a:xfrm>
           <a:prstGeom prst="rect">
@@ -7001,13 +7001,13 @@
               </a:spcAft>
             </a:pPr>
             <a:r>
-              <a:rPr b="0" i="0" sz="2397" lang="pt-BR">
+              <a:rPr b="1" i="0" sz="2397" lang="pt-BR">
                 <a:solidFill>
                   <a:srgbClr val="E9C46A"/>
                 </a:solidFill>
-                <a:latin typeface="Barlow SemiBold"/>
-                <a:ea typeface="Barlow SemiBold"/>
-                <a:cs typeface="Barlow SemiBold"/>
+                <a:latin typeface="Barlow"/>
+                <a:ea typeface="Barlow"/>
+                <a:cs typeface="Barlow"/>
               </a:rPr>
               <a:t>Na sexta, parte 5</a:t>
             </a:r>
@@ -7022,7 +7022,7 @@
         </p:nvSpPr>
         <p:spPr>
           <a:xfrm>
-            <a:off x="1380001" y="5952650"/>
+            <a:off x="1380001" y="5743083"/>
             <a:ext cx="7526848" cy="1867049"/>
           </a:xfrm>
           <a:prstGeom prst="rect">
@@ -7081,7 +7081,7 @@
         </p:nvSpPr>
         <p:spPr>
           <a:xfrm>
-            <a:off x="1767780" y="8423954"/>
+            <a:off x="1767780" y="8325199"/>
             <a:ext cx="7354537" cy="987552"/>
           </a:xfrm>
           <a:prstGeom prst="rect">
